--- a/public/level4/downloads/slides/Level4_Lesson8_Slides.pptx
+++ b/public/level4/downloads/slides/Level4_Lesson8_Slides.pptx
@@ -1041,12 +1041,12 @@
           <a:lstStyle/>
           <a:p>
             <a:r>
-              <a:t>"Hear it, say it" (3 min): Point to the script lines. gonna = going to: "The bus is gonna take a detour." Then practice might (the last t is very short: It migh' be late) and Do you know…? with the voice going up at the end. Listen to the reporter's pauses. The class repeats the two lines twice.</a:t>
-            </a:r>
-          </a:p>
-          <a:p>
-            <a:r>
-              <a:t>Reductions: the listening has gonna. Learners need to understand it; they can always say going to.</a:t>
+              <a:t>"Hear it, say it" (3 min): Point to the script lines. gonna = going to: "The bus is going to take a detour." Then practice might (the last t is very short: It migh' be late) and Do you know…? with the voice going up at the end. Listen to the reporter's pauses. The class repeats the two lines twice.</a:t>
+            </a:r>
+          </a:p>
+          <a:p>
+            <a:r>
+              <a:t>Reductions: the listening says going to. People often say gonna. Learners only need to recognize it.</a:t>
             </a:r>
           </a:p>
           <a:p>
@@ -1486,7 +1486,7 @@
           </a:p>
           <a:p>
             <a:r>
-              <a:t>No speaker? Read the script with a volunteer at a natural, friendly speed, two times. Say gonna and wanna where the script has them.</a:t>
+              <a:t>No speaker? Read the script with a volunteer at a natural, friendly speed, two times. The script says going to and want to. People often say gonna and wanna; learners only need to recognize those words.</a:t>
             </a:r>
           </a:p>
           <a:p>
@@ -1546,7 +1546,7 @@
           </a:p>
           <a:p>
             <a:r>
-              <a:t>Marco: The bus is gonna take a detour on Pine Street. It might be fifteen minutes late.</a:t>
+              <a:t>Marco: The bus is going to take a detour on Pine Street. It might be fifteen minutes late.</a:t>
             </a:r>
           </a:p>
           <a:p>
@@ -1586,7 +1586,7 @@
           </a:p>
           <a:p>
             <a:r>
-              <a:t>Marco: I think it starts at First Avenue. I'm gonna look at the map tonight.</a:t>
+              <a:t>Marco: I think it starts at First Avenue. I'm going to look at the map tonight.</a:t>
             </a:r>
           </a:p>
           <a:p>
@@ -16417,6 +16417,17 @@
               <a:buNone/>
             </a:pPr>
             <a:r>
+              <a:rPr lang="en-US" sz="2000" dirty="0" b="1">
+                <a:solidFill>
+                  <a:srgbClr val="5B3FC4"/>
+                </a:solidFill>
+                <a:latin typeface="Lexend Deca" pitchFamily="34" charset="0"/>
+                <a:ea typeface="Lexend Deca" pitchFamily="34" charset="-122"/>
+                <a:cs typeface="Lexend Deca" pitchFamily="34" charset="-120"/>
+              </a:rPr>
+              <a:t>gonna</a:t>
+            </a:r>
+            <a:r>
               <a:rPr lang="en-US" sz="2000" dirty="0">
                 <a:solidFill>
                   <a:srgbClr val="1B2236"/>
@@ -16425,7 +16436,7 @@
                 <a:ea typeface="Lexend Deca" pitchFamily="34" charset="-122"/>
                 <a:cs typeface="Lexend Deca" pitchFamily="34" charset="-120"/>
               </a:rPr>
-              <a:t>You will hear </a:t>
+              <a:t> is a short form. This listening says </a:t>
             </a:r>
             <a:r>
               <a:rPr lang="en-US" sz="2000" dirty="0" b="1">
@@ -16436,7 +16447,7 @@
                 <a:ea typeface="Lexend Deca" pitchFamily="34" charset="-122"/>
                 <a:cs typeface="Lexend Deca" pitchFamily="34" charset="-120"/>
               </a:rPr>
-              <a:t>gonna</a:t>
+              <a:t>going to</a:t>
             </a:r>
             <a:r>
               <a:rPr lang="en-US" sz="2000" dirty="0">
@@ -16624,7 +16635,7 @@
                 <a:ea typeface="Lexend Deca" pitchFamily="34" charset="-122"/>
                 <a:cs typeface="Lexend Deca" pitchFamily="34" charset="-120"/>
               </a:rPr>
-              <a:t>gonna</a:t>
+              <a:t>going to</a:t>
             </a:r>
             <a:r>
               <a:rPr lang="en-US" sz="1800" dirty="0" b="1">
@@ -16711,7 +16722,7 @@
                 <a:ea typeface="Lexend Deca" pitchFamily="34" charset="-122"/>
                 <a:cs typeface="Lexend Deca" pitchFamily="34" charset="-120"/>
               </a:rPr>
-              <a:t>gonna</a:t>
+              <a:t>going to</a:t>
             </a:r>
             <a:r>
               <a:rPr lang="en-US" sz="1800" dirty="0" b="1">

--- a/public/level4/downloads/slides/Level4_Lesson8_Slides.pptx
+++ b/public/level4/downloads/slides/Level4_Lesson8_Slides.pptx
@@ -536,7 +536,7 @@
           </a:p>
           <a:p>
             <a:r>
-              <a:t>Audio: the listening audio for this lesson (about 1:59) is coming soon. It will use computer-generated voices (Chatterbox TTS cloned from synthetic Kokoro-82M reference clips); no recordings of real people. Until it is ready, read the listening script (in the notes of the Before You Listen slide) with a volunteer. The names and the story are invented.</a:t>
+              <a:t>Audio: synthetic voices, computer-generated (Chatterbox TTS cloned from Kokoro-82M reference clips). No recordings of real people. The names and the story are invented.</a:t>
             </a:r>
           </a:p>
           <a:p>
@@ -1481,7 +1481,7 @@
           </a:p>
           <a:p>
             <a:r>
-              <a:t>The audio (about 1:59) is coming soon. When it is ready, it plays the conversation once; press play again for play 2. Until then, read the listening script (at the end of these notes) with a volunteer.</a:t>
+              <a:t>The audio (L4_L8_listening.mp3, about 1:50) plays the conversation once. Press play again for play 2. A third play is fine if the class needs it.</a:t>
             </a:r>
           </a:p>
           <a:p>
@@ -1491,7 +1491,7 @@
           </a:p>
           <a:p>
             <a:r>
-              <a:t>Audio: the listening audio for this lesson (about 1:59) is coming soon. It will use computer-generated voices (Chatterbox TTS cloned from synthetic Kokoro-82M reference clips); no recordings of real people. Until it is ready, read the listening script (in the notes of the Before You Listen slide) with a volunteer. The names and the story are invented.</a:t>
+              <a:t>Audio: synthetic voices, computer-generated (Chatterbox TTS cloned from Kokoro-82M reference clips). No recordings of real people. The names and the story are invented.</a:t>
             </a:r>
           </a:p>
           <a:p>
@@ -1502,101 +1502,6 @@
           <a:p>
             <a:r>
               <a:t>Picture: Twemoji graphics by Twitter, Inc. and other contributors (https://github.com/jdecked/twemoji), CC BY 4.0 (https://creativecommons.org/licenses/by/4.0/); resized and combined, with signs and labels (images/CREDITS.md).</a:t>
-            </a:r>
-          </a:p>
-          <a:p>
-            <a:r>
-              <a:t>Listening script (the audio is coming soon; until then, read it aloud with a volunteer at a normal, friendly speed):</a:t>
-            </a:r>
-          </a:p>
-          <a:p>
-            <a:r>
-              <a:t>Narrator: Lesson eight. First, listen to a short news report on the radio. Then two coworkers talk about the news.</a:t>
-            </a:r>
-          </a:p>
-          <a:p>
-            <a:r>
-              <a:t>Diane Lee: Good morning. This is Diane Lee with your local news. Starting Monday, Oak Street will be closed between First and Fifth Avenue. Workers are going to replace an old water pipe under the street.</a:t>
-            </a:r>
-          </a:p>
-          <a:p>
-            <a:r>
-              <a:t>Diane Lee: The city says the construction might take two weeks. It may take longer if it rains.</a:t>
-            </a:r>
-          </a:p>
-          <a:p>
-            <a:r>
-              <a:t>Diane Lee: During the road closure, the number twelve bus will take a detour on Pine Street. Riders should expect delays of about fifteen minutes. The city will post updates on its website. I'm Diane Lee, and that's the news.</a:t>
-            </a:r>
-          </a:p>
-          <a:p>
-            <a:r>
-              <a:t>Narrator: Later that morning, at work, Marco and Joy talk about the news.</a:t>
-            </a:r>
-          </a:p>
-          <a:p>
-            <a:r>
-              <a:t>Marco: Joy, did you hear the news? They're closing Oak Street on Monday.</a:t>
-            </a:r>
-          </a:p>
-          <a:p>
-            <a:r>
-              <a:t>Joy: Oh no. I take the number twelve bus on Oak Street every day.</a:t>
-            </a:r>
-          </a:p>
-          <a:p>
-            <a:r>
-              <a:t>Marco: The bus is going to take a detour on Pine Street. It might be fifteen minutes late.</a:t>
-            </a:r>
-          </a:p>
-          <a:p>
-            <a:r>
-              <a:t>Joy: Fifteen minutes? I might be late for work. Do you know when the bus leaves Pine Street?</a:t>
-            </a:r>
-          </a:p>
-          <a:p>
-            <a:r>
-              <a:t>Marco: I'm not sure. You could check the city website.</a:t>
-            </a:r>
-          </a:p>
-          <a:p>
-            <a:r>
-              <a:t>Joy: Good idea. Do you know how long the closure is?</a:t>
-            </a:r>
-          </a:p>
-          <a:p>
-            <a:r>
-              <a:t>Marco: They said two weeks. But it might take longer if it rains.</a:t>
-            </a:r>
-          </a:p>
-          <a:p>
-            <a:r>
-              <a:t>Joy: Hmm. Maybe I'll take the earlier bus. I don't want to be late.</a:t>
-            </a:r>
-          </a:p>
-          <a:p>
-            <a:r>
-              <a:t>Marco: Or I could give you a ride. I drive past your street.</a:t>
-            </a:r>
-          </a:p>
-          <a:p>
-            <a:r>
-              <a:t>Joy: Really? That would be great. Do you know where the detour starts?</a:t>
-            </a:r>
-          </a:p>
-          <a:p>
-            <a:r>
-              <a:t>Marco: I think it starts at First Avenue. I'm going to look at the map tonight.</a:t>
-            </a:r>
-          </a:p>
-          <a:p>
-            <a:r>
-              <a:t>Joy: Thanks, Marco!</a:t>
-            </a:r>
-          </a:p>
-          <a:p>
-            <a:r>
-              <a:t>Narrator: That's the end of the listening.</a:t>
             </a:r>
           </a:p>
         </p:txBody>
@@ -12003,7 +11908,7 @@
                 <a:ea typeface="Lexend Deca" pitchFamily="34" charset="-122"/>
                 <a:cs typeface="Lexend Deca" pitchFamily="34" charset="-120"/>
               </a:rPr>
-              <a:t>Audio (about 1:59): coming soon.</a:t>
+              <a:t>Audio: about 1:50. It plays once.</a:t>
             </a:r>
             <a:endParaRPr lang="en-US" sz="2200" dirty="0"/>
           </a:p>
@@ -31835,7 +31740,7 @@
                 <a:ea typeface="Lexend Deca" pitchFamily="34" charset="-122"/>
                 <a:cs typeface="Lexend Deca" pitchFamily="34" charset="-120"/>
               </a:rPr>
-              <a:t>Audio (coming soon): synthetic voices made with Chatterbox TTS (MIT License), cloned from short synthetic reference clips made with Kokoro-82M (Apache License 2.0). No recordings of real people. Each file will carry an inaudible Perth watermark marking it as AI-generated. Font: Lexend Deca (OFL 1.1).</a:t>
+              <a:t>Audio: synthetic voices made with Chatterbox TTS (MIT License), cloned from short synthetic reference clips made with Kokoro-82M (Apache License 2.0). No recordings of real people were used. Each file carries an inaudible Perth watermark marking it as AI-generated. Font: Lexend Deca (OFL 1.1).</a:t>
             </a:r>
             <a:endParaRPr lang="en-US" sz="1350" dirty="0" b="0"/>
           </a:p>

--- a/public/level4/downloads/slides/Level4_Lesson8_Slides.pptx
+++ b/public/level4/downloads/slides/Level4_Lesson8_Slides.pptx
@@ -1047,6 +1047,11 @@
           <a:p>
             <a:r>
               <a:t>Reductions: the listening says going to. People often say gonna. Learners only need to recognize it.</a:t>
+            </a:r>
+          </a:p>
+          <a:p>
+            <a:r>
+              <a:t>Everyday English: people often say gonna (going to) and wanna (want to). Learners will hear them often. They are fine in casual talk; in writing, at a job interview, or in a formal email, use going to and want to. The listening uses the full forms.</a:t>
             </a:r>
           </a:p>
           <a:p>
@@ -16341,7 +16346,7 @@
                 <a:ea typeface="Lexend Deca" pitchFamily="34" charset="-122"/>
                 <a:cs typeface="Lexend Deca" pitchFamily="34" charset="-120"/>
               </a:rPr>
-              <a:t> is a short form. This listening says </a:t>
+              <a:t> = going to, </a:t>
             </a:r>
             <a:r>
               <a:rPr lang="en-US" sz="2000" dirty="0" b="1">
@@ -16352,7 +16357,7 @@
                 <a:ea typeface="Lexend Deca" pitchFamily="34" charset="-122"/>
                 <a:cs typeface="Lexend Deca" pitchFamily="34" charset="-120"/>
               </a:rPr>
-              <a:t>going to</a:t>
+              <a:t>wanna</a:t>
             </a:r>
             <a:r>
               <a:rPr lang="en-US" sz="2000" dirty="0">
@@ -16363,7 +16368,7 @@
                 <a:ea typeface="Lexend Deca" pitchFamily="34" charset="-122"/>
                 <a:cs typeface="Lexend Deca" pitchFamily="34" charset="-120"/>
               </a:rPr>
-              <a:t>.</a:t>
+              <a:t> = want to: fine in everyday talk.</a:t>
             </a:r>
             <a:endParaRPr lang="en-US" sz="2000" dirty="0"/>
           </a:p>
